--- a/classes/parte-7-red-team-y-operaciones-ofensivas/177-red-teaming-fisico/clase-177-presentacion.pptx
+++ b/classes/parte-7-red-team-y-operaciones-ofensivas/177-red-teaming-fisico/clase-177-presentacion.pptx
@@ -17,6 +17,9 @@
     <p:sldId id="265" r:id="rId16"/>
     <p:sldId id="266" r:id="rId17"/>
     <p:sldId id="267" r:id="rId18"/>
+    <p:sldId id="268" r:id="rId19"/>
+    <p:sldId id="269" r:id="rId20"/>
+    <p:sldId id="270" r:id="rId21"/>
   </p:sldIdLst>
   <p:sldSz cx="9144000" cy="6858000" type="screen4x3"/>
   <p:notesSz cx="6858000" cy="9144000"/>
@@ -3198,7 +3201,7 @@
                   <a:srgbClr val="0B3D2E"/>
                 </a:solidFill>
               </a:rPr>
-              <a:t>⚠️ Errores comunes</a:t>
+              <a:t>✍️ Ejercicios</a:t>
             </a:r>
           </a:p>
         </p:txBody>
@@ -3236,67 +3239,82 @@
                   <a:srgbClr val="22282E"/>
                 </a:solidFill>
               </a:rPr>
-              <a:t>•  Sin carta de autorización — Riesgo legal enorme; nunca operes sin ella firmada</a:t>
-            </a:r>
-          </a:p>
-          <a:p>
-            <a:pPr>
-              <a:spcAft>
-                <a:spcPts val="600"/>
-              </a:spcAft>
-            </a:pPr>
-            <a:r>
-              <a:rPr sz="1500">
-                <a:solidFill>
-                  <a:srgbClr val="22282E"/>
-                </a:solidFill>
-              </a:rPr>
-              <a:t>•  El clonado RFID no lee — Frecuencia equivocada (125 kHz vs 13.56 MHz); identifica el tipo de tarjeta</a:t>
-            </a:r>
-          </a:p>
-          <a:p>
-            <a:pPr>
-              <a:spcAft>
-                <a:spcPts val="600"/>
-              </a:spcAft>
-            </a:pPr>
-            <a:r>
-              <a:rPr sz="1500">
-                <a:solidFill>
-                  <a:srgbClr val="22282E"/>
-                </a:solidFill>
-              </a:rPr>
-              <a:t>•  HID no ejecuta — Layout de teclado distinto; ajusta el mapeo de teclas</a:t>
-            </a:r>
-          </a:p>
-          <a:p>
-            <a:pPr>
-              <a:spcAft>
-                <a:spcPts val="600"/>
-              </a:spcAft>
-            </a:pPr>
-            <a:r>
-              <a:rPr sz="1500">
-                <a:solidFill>
-                  <a:srgbClr val="22282E"/>
-                </a:solidFill>
-              </a:rPr>
-              <a:t>•  Dropbox no llama a casa — Egress filtrado; usa un canal permitido (HTTPS por proxy)</a:t>
-            </a:r>
-          </a:p>
-          <a:p>
-            <a:pPr>
-              <a:spcAft>
-                <a:spcPts val="600"/>
-              </a:spcAft>
-            </a:pPr>
-            <a:r>
-              <a:rPr sz="1500">
-                <a:solidFill>
-                  <a:srgbClr val="22282E"/>
-                </a:solidFill>
-              </a:rPr>
-              <a:t>•  Pretexto poco creíble — Falta recon; adapta props y discurso al entorno real</a:t>
+              <a:t>•  Redacta un plan de reconocimiento físico para un edificio ficticio.</a:t>
+            </a:r>
+          </a:p>
+          <a:p>
+            <a:pPr>
+              <a:spcAft>
+                <a:spcPts val="600"/>
+              </a:spcAft>
+            </a:pPr>
+            <a:r>
+              <a:rPr sz="1500">
+                <a:solidFill>
+                  <a:srgbClr val="22282E"/>
+                </a:solidFill>
+              </a:rPr>
+              <a:t>•  Diseña dos pretextos presenciales y evalúa sus riesgos.</a:t>
+            </a:r>
+          </a:p>
+          <a:p>
+            <a:pPr>
+              <a:spcAft>
+                <a:spcPts val="600"/>
+              </a:spcAft>
+            </a:pPr>
+            <a:r>
+              <a:rPr sz="1500">
+                <a:solidFill>
+                  <a:srgbClr val="22282E"/>
+                </a:solidFill>
+              </a:rPr>
+              <a:t>•  Explica el clonado RFID y sus límites según la frecuencia.</a:t>
+            </a:r>
+          </a:p>
+          <a:p>
+            <a:pPr>
+              <a:spcAft>
+                <a:spcPts val="600"/>
+              </a:spcAft>
+            </a:pPr>
+            <a:r>
+              <a:rPr sz="1500">
+                <a:solidFill>
+                  <a:srgbClr val="22282E"/>
+                </a:solidFill>
+              </a:rPr>
+              <a:t>•  Programa un payload HID que lance una shell en tu lab.</a:t>
+            </a:r>
+          </a:p>
+          <a:p>
+            <a:pPr>
+              <a:spcAft>
+                <a:spcPts val="600"/>
+              </a:spcAft>
+            </a:pPr>
+            <a:r>
+              <a:rPr sz="1500">
+                <a:solidFill>
+                  <a:srgbClr val="22282E"/>
+                </a:solidFill>
+              </a:rPr>
+              <a:t>•  Configura un dropbox que llame a casa por C2.</a:t>
+            </a:r>
+          </a:p>
+          <a:p>
+            <a:pPr>
+              <a:spcAft>
+                <a:spcPts val="600"/>
+              </a:spcAft>
+            </a:pPr>
+            <a:r>
+              <a:rPr sz="1500">
+                <a:solidFill>
+                  <a:srgbClr val="22282E"/>
+                </a:solidFill>
+              </a:rPr>
+              <a:t>•  Escribe una plantilla de carta de autorización con 8 campos.</a:t>
             </a:r>
           </a:p>
         </p:txBody>
@@ -3347,7 +3365,7 @@
                   <a:srgbClr val="0B3D2E"/>
                 </a:solidFill>
               </a:rPr>
-              <a:t>❓ Preguntas frecuentes</a:t>
+              <a:t>📝 Reto verificable</a:t>
             </a:r>
           </a:p>
         </p:txBody>
@@ -3385,82 +3403,22 @@
                   <a:srgbClr val="22282E"/>
                 </a:solidFill>
               </a:rPr>
-              <a:t>•  ❓ ¿El red teaming físico es legal?</a:t>
-            </a:r>
-          </a:p>
-          <a:p>
-            <a:pPr>
-              <a:spcAft>
-                <a:spcPts val="600"/>
-              </a:spcAft>
-            </a:pPr>
-            <a:r>
-              <a:rPr sz="1500">
-                <a:solidFill>
-                  <a:srgbClr val="22282E"/>
-                </a:solidFill>
-              </a:rPr>
-              <a:t>•  Solo con autorización escrita del propietario y dentro de RoE claras. Sin eso, es allanamiento. La carta de autorización es innegociable.</a:t>
-            </a:r>
-          </a:p>
-          <a:p>
-            <a:pPr>
-              <a:spcAft>
-                <a:spcPts val="600"/>
-              </a:spcAft>
-            </a:pPr>
-            <a:r>
-              <a:rPr sz="1500">
-                <a:solidFill>
-                  <a:srgbClr val="22282E"/>
-                </a:solidFill>
-              </a:rPr>
-              <a:t>•  ❓ ¿Por qué combinar físico y red?</a:t>
-            </a:r>
-          </a:p>
-          <a:p>
-            <a:pPr>
-              <a:spcAft>
-                <a:spcPts val="600"/>
-              </a:spcAft>
-            </a:pPr>
-            <a:r>
-              <a:rPr sz="1500">
-                <a:solidFill>
-                  <a:srgbClr val="22282E"/>
-                </a:solidFill>
-              </a:rPr>
-              <a:t>•  Porque un atacante real no respeta la frontera: un dropbox o un badge clonado puede saltarse todo el perímetro de red. El ejercicio evalúa esa realidad.</a:t>
-            </a:r>
-          </a:p>
-          <a:p>
-            <a:pPr>
-              <a:spcAft>
-                <a:spcPts val="600"/>
-              </a:spcAft>
-            </a:pPr>
-            <a:r>
-              <a:rPr sz="1500">
-                <a:solidFill>
-                  <a:srgbClr val="22282E"/>
-                </a:solidFill>
-              </a:rPr>
-              <a:t>•  ❓ ¿Puedo practicar lockpicking?</a:t>
-            </a:r>
-          </a:p>
-          <a:p>
-            <a:pPr>
-              <a:spcAft>
-                <a:spcPts val="600"/>
-              </a:spcAft>
-            </a:pPr>
-            <a:r>
-              <a:rPr sz="1500">
-                <a:solidFill>
-                  <a:srgbClr val="22282E"/>
-                </a:solidFill>
-              </a:rPr>
-              <a:t>•  Solo en cerraduras propias y donde sea legal poseer las herramientas. Varían las leyes por país; infórmate antes.</a:t>
+              <a:t>•  Prepara un kit de operación física (teórico + práctico en tu entorno): plan de recon, pretexto, un HID que lanza C2 en tu equipo, un dropbox que establece C2 en tu lab y una carta de autorización.</a:t>
+            </a:r>
+          </a:p>
+          <a:p>
+            <a:pPr>
+              <a:spcAft>
+                <a:spcPts val="600"/>
+              </a:spcAft>
+            </a:pPr>
+            <a:r>
+              <a:rPr sz="1500">
+                <a:solidFill>
+                  <a:srgbClr val="22282E"/>
+                </a:solidFill>
+              </a:rPr>
+              <a:t>•  Criterio de aceptación: demuestras el HID abriendo una sesión C2 en tu propia máquina y el dropbox estableciendo C2 en tu lab; entregas el plan de recon, el pretexto y la carta de autorización…</a:t>
             </a:r>
           </a:p>
         </p:txBody>
@@ -3511,7 +3469,7 @@
                   <a:srgbClr val="0B3D2E"/>
                 </a:solidFill>
               </a:rPr>
-              <a:t>🔗 Referencias</a:t>
+              <a:t>⚠️ Errores comunes</a:t>
             </a:r>
           </a:p>
         </p:txBody>
@@ -3549,56 +3507,459 @@
                   <a:srgbClr val="22282E"/>
                 </a:solidFill>
               </a:rPr>
-              <a:t>•  Bryant, T. — Operator Handbook.</a:t>
-            </a:r>
-          </a:p>
-          <a:p>
-            <a:pPr>
-              <a:spcAft>
-                <a:spcPts val="600"/>
-              </a:spcAft>
-            </a:pPr>
-            <a:r>
-              <a:rPr sz="1500">
-                <a:solidFill>
-                  <a:srgbClr val="22282E"/>
-                </a:solidFill>
-              </a:rPr>
-              <a:t>•  MITRE ATT&amp;CK — Hardware Additions (T1200). &lt;https://attack.mitre.org/techniques/T1200/&gt;</a:t>
-            </a:r>
-          </a:p>
-          <a:p>
-            <a:pPr>
-              <a:spcAft>
-                <a:spcPts val="600"/>
-              </a:spcAft>
-            </a:pPr>
-            <a:r>
-              <a:rPr sz="1500">
-                <a:solidFill>
-                  <a:srgbClr val="22282E"/>
-                </a:solidFill>
-              </a:rPr>
-              <a:t>•  TOOOL — The Open Organisation Of Lockpickers (recursos educativos). &lt;https://toool.us/&gt;</a:t>
-            </a:r>
-          </a:p>
-          <a:p>
-            <a:pPr>
-              <a:spcAft>
-                <a:spcPts val="600"/>
-              </a:spcAft>
-            </a:pPr>
-            <a:r>
-              <a:rPr sz="1500">
-                <a:solidFill>
-                  <a:srgbClr val="22282E"/>
-                </a:solidFill>
-              </a:rPr>
-              <a:t>•  Documentación de Proxmark3 y Hak5 (Rubber Ducky) como referencia técnica.</a:t>
-            </a:r>
-          </a:p>
-        </p:txBody>
-      </p:sp>
+              <a:t>•  Sin carta de autorización — Riesgo legal enorme; nunca operes sin ella firmada</a:t>
+            </a:r>
+          </a:p>
+          <a:p>
+            <a:pPr>
+              <a:spcAft>
+                <a:spcPts val="600"/>
+              </a:spcAft>
+            </a:pPr>
+            <a:r>
+              <a:rPr sz="1500">
+                <a:solidFill>
+                  <a:srgbClr val="22282E"/>
+                </a:solidFill>
+              </a:rPr>
+              <a:t>•  El clonado RFID no lee — Frecuencia equivocada (125 kHz vs 13.56 MHz); identifica el tipo de tarjeta</a:t>
+            </a:r>
+          </a:p>
+          <a:p>
+            <a:pPr>
+              <a:spcAft>
+                <a:spcPts val="600"/>
+              </a:spcAft>
+            </a:pPr>
+            <a:r>
+              <a:rPr sz="1500">
+                <a:solidFill>
+                  <a:srgbClr val="22282E"/>
+                </a:solidFill>
+              </a:rPr>
+              <a:t>•  HID no ejecuta — Layout de teclado distinto; ajusta el mapeo de teclas</a:t>
+            </a:r>
+          </a:p>
+          <a:p>
+            <a:pPr>
+              <a:spcAft>
+                <a:spcPts val="600"/>
+              </a:spcAft>
+            </a:pPr>
+            <a:r>
+              <a:rPr sz="1500">
+                <a:solidFill>
+                  <a:srgbClr val="22282E"/>
+                </a:solidFill>
+              </a:rPr>
+              <a:t>•  Dropbox no llama a casa — Egress filtrado; usa un canal permitido (HTTPS por proxy)</a:t>
+            </a:r>
+          </a:p>
+          <a:p>
+            <a:pPr>
+              <a:spcAft>
+                <a:spcPts val="600"/>
+              </a:spcAft>
+            </a:pPr>
+            <a:r>
+              <a:rPr sz="1500">
+                <a:solidFill>
+                  <a:srgbClr val="22282E"/>
+                </a:solidFill>
+              </a:rPr>
+              <a:t>•  Pretexto poco creíble — Falta recon; adapta props y discurso al entorno real</a:t>
+            </a:r>
+          </a:p>
+        </p:txBody>
+      </p:sp>
+    </p:spTree>
+  </p:cSld>
+  <p:clrMapOvr>
+    <a:masterClrMapping/>
+  </p:clrMapOvr>
+</p:sld>
+</file>
+
+<file path=ppt/slides/slide13.xml><?xml version="1.0" encoding="utf-8"?>
+<p:sld xmlns:a="http://schemas.openxmlformats.org/drawingml/2006/main" xmlns:p="http://schemas.openxmlformats.org/presentationml/2006/main" xmlns:r="http://schemas.openxmlformats.org/officeDocument/2006/relationships">
+  <p:cSld>
+    <p:spTree>
+      <p:nvGrpSpPr>
+        <p:cNvPr id="1" name=""/>
+        <p:cNvGrpSpPr/>
+        <p:nvPr/>
+      </p:nvGrpSpPr>
+      <p:grpSpPr/>
+      <p:sp>
+        <p:nvSpPr>
+          <p:cNvPr id="2" name="TextBox 1"/>
+          <p:cNvSpPr txBox="1"/>
+          <p:nvPr/>
+        </p:nvSpPr>
+        <p:spPr>
+          <a:xfrm>
+            <a:off x="457200" y="320040"/>
+            <a:ext cx="8229600" cy="822960"/>
+          </a:xfrm>
+          <a:prstGeom prst="rect">
+            <a:avLst/>
+          </a:prstGeom>
+          <a:noFill/>
+        </p:spPr>
+        <p:txBody>
+          <a:bodyPr wrap="square">
+            <a:spAutoFit/>
+          </a:bodyPr>
+          <a:lstStyle/>
+          <a:p>
+            <a:r>
+              <a:rPr sz="2600" b="1">
+                <a:solidFill>
+                  <a:srgbClr val="0B3D2E"/>
+                </a:solidFill>
+              </a:rPr>
+              <a:t>❓ Preguntas frecuentes</a:t>
+            </a:r>
+          </a:p>
+        </p:txBody>
+      </p:sp>
+      <p:sp>
+        <p:nvSpPr>
+          <p:cNvPr id="3" name="TextBox 2"/>
+          <p:cNvSpPr txBox="1"/>
+          <p:nvPr/>
+        </p:nvSpPr>
+        <p:spPr>
+          <a:xfrm>
+            <a:off x="457200" y="1280160"/>
+            <a:ext cx="8229600" cy="4937760"/>
+          </a:xfrm>
+          <a:prstGeom prst="rect">
+            <a:avLst/>
+          </a:prstGeom>
+          <a:noFill/>
+        </p:spPr>
+        <p:txBody>
+          <a:bodyPr wrap="square">
+            <a:spAutoFit/>
+          </a:bodyPr>
+          <a:lstStyle/>
+          <a:p>
+            <a:pPr>
+              <a:spcAft>
+                <a:spcPts val="600"/>
+              </a:spcAft>
+            </a:pPr>
+            <a:r>
+              <a:rPr sz="1500">
+                <a:solidFill>
+                  <a:srgbClr val="22282E"/>
+                </a:solidFill>
+              </a:rPr>
+              <a:t>•  ❓ ¿El red teaming físico es legal?</a:t>
+            </a:r>
+          </a:p>
+          <a:p>
+            <a:pPr>
+              <a:spcAft>
+                <a:spcPts val="600"/>
+              </a:spcAft>
+            </a:pPr>
+            <a:r>
+              <a:rPr sz="1500">
+                <a:solidFill>
+                  <a:srgbClr val="22282E"/>
+                </a:solidFill>
+              </a:rPr>
+              <a:t>•  Solo con autorización escrita del propietario y dentro de RoE claras. Sin eso, es allanamiento. La carta de autorización es innegociable.</a:t>
+            </a:r>
+          </a:p>
+          <a:p>
+            <a:pPr>
+              <a:spcAft>
+                <a:spcPts val="600"/>
+              </a:spcAft>
+            </a:pPr>
+            <a:r>
+              <a:rPr sz="1500">
+                <a:solidFill>
+                  <a:srgbClr val="22282E"/>
+                </a:solidFill>
+              </a:rPr>
+              <a:t>•  ❓ ¿Por qué combinar físico y red?</a:t>
+            </a:r>
+          </a:p>
+          <a:p>
+            <a:pPr>
+              <a:spcAft>
+                <a:spcPts val="600"/>
+              </a:spcAft>
+            </a:pPr>
+            <a:r>
+              <a:rPr sz="1500">
+                <a:solidFill>
+                  <a:srgbClr val="22282E"/>
+                </a:solidFill>
+              </a:rPr>
+              <a:t>•  Porque un atacante real no respeta la frontera: un dropbox o un badge clonado puede saltarse todo el perímetro de red. El ejercicio evalúa esa realidad.</a:t>
+            </a:r>
+          </a:p>
+          <a:p>
+            <a:pPr>
+              <a:spcAft>
+                <a:spcPts val="600"/>
+              </a:spcAft>
+            </a:pPr>
+            <a:r>
+              <a:rPr sz="1500">
+                <a:solidFill>
+                  <a:srgbClr val="22282E"/>
+                </a:solidFill>
+              </a:rPr>
+              <a:t>•  ❓ ¿Puedo practicar lockpicking?</a:t>
+            </a:r>
+          </a:p>
+          <a:p>
+            <a:pPr>
+              <a:spcAft>
+                <a:spcPts val="600"/>
+              </a:spcAft>
+            </a:pPr>
+            <a:r>
+              <a:rPr sz="1500">
+                <a:solidFill>
+                  <a:srgbClr val="22282E"/>
+                </a:solidFill>
+              </a:rPr>
+              <a:t>•  Solo en cerraduras propias y donde sea legal poseer las herramientas. Varían las leyes por país; infórmate antes.</a:t>
+            </a:r>
+          </a:p>
+        </p:txBody>
+      </p:sp>
+    </p:spTree>
+  </p:cSld>
+  <p:clrMapOvr>
+    <a:masterClrMapping/>
+  </p:clrMapOvr>
+</p:sld>
+</file>
+
+<file path=ppt/slides/slide14.xml><?xml version="1.0" encoding="utf-8"?>
+<p:sld xmlns:a="http://schemas.openxmlformats.org/drawingml/2006/main" xmlns:p="http://schemas.openxmlformats.org/presentationml/2006/main" xmlns:r="http://schemas.openxmlformats.org/officeDocument/2006/relationships">
+  <p:cSld>
+    <p:spTree>
+      <p:nvGrpSpPr>
+        <p:cNvPr id="1" name=""/>
+        <p:cNvGrpSpPr/>
+        <p:nvPr/>
+      </p:nvGrpSpPr>
+      <p:grpSpPr/>
+      <p:sp>
+        <p:nvSpPr>
+          <p:cNvPr id="2" name="TextBox 1"/>
+          <p:cNvSpPr txBox="1"/>
+          <p:nvPr/>
+        </p:nvSpPr>
+        <p:spPr>
+          <a:xfrm>
+            <a:off x="457200" y="320040"/>
+            <a:ext cx="8229600" cy="822960"/>
+          </a:xfrm>
+          <a:prstGeom prst="rect">
+            <a:avLst/>
+          </a:prstGeom>
+          <a:noFill/>
+        </p:spPr>
+        <p:txBody>
+          <a:bodyPr wrap="square">
+            <a:spAutoFit/>
+          </a:bodyPr>
+          <a:lstStyle/>
+          <a:p>
+            <a:r>
+              <a:rPr sz="2600" b="1">
+                <a:solidFill>
+                  <a:srgbClr val="0B3D2E"/>
+                </a:solidFill>
+              </a:rPr>
+              <a:t>🔗 Referencias</a:t>
+            </a:r>
+          </a:p>
+        </p:txBody>
+      </p:sp>
+      <p:sp>
+        <p:nvSpPr>
+          <p:cNvPr id="3" name="TextBox 2"/>
+          <p:cNvSpPr txBox="1"/>
+          <p:nvPr/>
+        </p:nvSpPr>
+        <p:spPr>
+          <a:xfrm>
+            <a:off x="457200" y="1280160"/>
+            <a:ext cx="8229600" cy="4937760"/>
+          </a:xfrm>
+          <a:prstGeom prst="rect">
+            <a:avLst/>
+          </a:prstGeom>
+          <a:noFill/>
+        </p:spPr>
+        <p:txBody>
+          <a:bodyPr wrap="square">
+            <a:spAutoFit/>
+          </a:bodyPr>
+          <a:lstStyle/>
+          <a:p>
+            <a:pPr>
+              <a:spcAft>
+                <a:spcPts val="600"/>
+              </a:spcAft>
+            </a:pPr>
+            <a:r>
+              <a:rPr sz="1500">
+                <a:solidFill>
+                  <a:srgbClr val="22282E"/>
+                </a:solidFill>
+              </a:rPr>
+              <a:t>•  NIST — Technical Guide to Information Security Testing and Assessment, SP 800-115. &lt;https://doi.org/10.6028/NIST.SP.800-115&gt; — base para autorización, planificación segura, evidencia y reglas de…</a:t>
+            </a:r>
+          </a:p>
+          <a:p>
+            <a:pPr>
+              <a:spcAft>
+                <a:spcPts val="600"/>
+              </a:spcAft>
+            </a:pPr>
+            <a:r>
+              <a:rPr sz="1500">
+                <a:solidFill>
+                  <a:srgbClr val="22282E"/>
+                </a:solidFill>
+              </a:rPr>
+              <a:t>•  NIST — Security and Privacy Controls for Information Systems and Organizations, SP 800-53 Rev. 5, familia PE. &lt;https://doi.org/10.6028/NIST.SP.800-53r5&gt; — sustenta defensa física en profundidad…</a:t>
+            </a:r>
+          </a:p>
+          <a:p>
+            <a:pPr>
+              <a:spcAft>
+                <a:spcPts val="600"/>
+              </a:spcAft>
+            </a:pPr>
+            <a:r>
+              <a:rPr sz="1500">
+                <a:solidFill>
+                  <a:srgbClr val="22282E"/>
+                </a:solidFill>
+              </a:rPr>
+              <a:t>•  MITRE ATT&amp;CK — Hardware Additions (T1200). &lt;https://attack.mitre.org/techniques/T1200/&gt; — clasificación del riesgo de añadir dispositivos y sus mitigaciones.</a:t>
+            </a:r>
+          </a:p>
+          <a:p>
+            <a:pPr>
+              <a:spcAft>
+                <a:spcPts val="600"/>
+              </a:spcAft>
+            </a:pPr>
+            <a:r>
+              <a:rPr sz="1500">
+                <a:solidFill>
+                  <a:srgbClr val="22282E"/>
+                </a:solidFill>
+              </a:rPr>
+              <a:t>•  TOOOL — recursos educativos y código ético. &lt;https://toool.us/&gt; — referencia de seguridad y práctica responsable de cerraduras.</a:t>
+            </a:r>
+          </a:p>
+          <a:p>
+            <a:pPr>
+              <a:spcAft>
+                <a:spcPts val="600"/>
+              </a:spcAft>
+            </a:pPr>
+            <a:r>
+              <a:rPr sz="1500">
+                <a:solidFill>
+                  <a:srgbClr val="22282E"/>
+                </a:solidFill>
+              </a:rPr>
+              <a:t>•  Proxmark3. &lt;https://github.com/RfidResearchGroup/proxmark3&gt; y Hak5 USB Rubber Ducky. &lt;https://docs.hak5.org/hak5-usb-rubber-ducky/&gt; — documentación de los dispositivos del laboratorio, sin asumir que…</a:t>
+            </a:r>
+          </a:p>
+        </p:txBody>
+      </p:sp>
+    </p:spTree>
+  </p:cSld>
+  <p:clrMapOvr>
+    <a:masterClrMapping/>
+  </p:clrMapOvr>
+</p:sld>
+</file>
+
+<file path=ppt/slides/slide15.xml><?xml version="1.0" encoding="utf-8"?>
+<p:sld xmlns:a="http://schemas.openxmlformats.org/drawingml/2006/main" xmlns:p="http://schemas.openxmlformats.org/presentationml/2006/main" xmlns:r="http://schemas.openxmlformats.org/officeDocument/2006/relationships">
+  <p:cSld>
+    <p:spTree>
+      <p:nvGrpSpPr>
+        <p:cNvPr id="1" name=""/>
+        <p:cNvGrpSpPr/>
+        <p:nvPr/>
+      </p:nvGrpSpPr>
+      <p:grpSpPr/>
+      <p:sp>
+        <p:nvSpPr>
+          <p:cNvPr id="2" name="TextBox 1"/>
+          <p:cNvSpPr txBox="1"/>
+          <p:nvPr/>
+        </p:nvSpPr>
+        <p:spPr>
+          <a:xfrm>
+            <a:off x="457200" y="274320"/>
+            <a:ext cx="8229600" cy="640080"/>
+          </a:xfrm>
+          <a:prstGeom prst="rect">
+            <a:avLst/>
+          </a:prstGeom>
+          <a:noFill/>
+        </p:spPr>
+        <p:txBody>
+          <a:bodyPr wrap="square">
+            <a:spAutoFit/>
+          </a:bodyPr>
+          <a:lstStyle/>
+          <a:p>
+            <a:r>
+              <a:rPr sz="2200" b="1">
+                <a:solidFill>
+                  <a:srgbClr val="0B3D2E"/>
+                </a:solidFill>
+              </a:rPr>
+              <a:t>Diagrama de la clase</a:t>
+            </a:r>
+          </a:p>
+        </p:txBody>
+      </p:sp>
+      <p:pic>
+        <p:nvPicPr>
+          <p:cNvPr id="3" name="Picture 2" descr="096dfbf77107f147.png"/>
+          <p:cNvPicPr>
+            <a:picLocks noChangeAspect="1"/>
+          </p:cNvPicPr>
+          <p:nvPr/>
+        </p:nvPicPr>
+        <p:blipFill>
+          <a:blip r:embed="rId2"/>
+          <a:stretch>
+            <a:fillRect/>
+          </a:stretch>
+        </p:blipFill>
+        <p:spPr>
+          <a:xfrm>
+            <a:off x="1372826" y="1097280"/>
+            <a:ext cx="6398348" cy="5303520"/>
+          </a:xfrm>
+          <a:prstGeom prst="rect">
+            <a:avLst/>
+          </a:prstGeom>
+        </p:spPr>
+      </p:pic>
     </p:spTree>
   </p:cSld>
   <p:clrMapOvr>
@@ -3683,7 +4044,7 @@
                   <a:srgbClr val="22282E"/>
                 </a:solidFill>
               </a:rPr>
-              <a:t>•  Comprender la dimensión física del Red Team: cómo un atacante entra a un edificio, elude controles de acceso, clona credenciales, coloca dispositivos y usa ingeniería social presencial para lograr un foothold. El alumno aprenderá el proceso, las herramientas y —de forma central— el marco legal y ético estricto que hace posible este trabajo.</a:t>
+              <a:t>•  Comprender la dimensión física del Red Team: cómo un atacante entra a un edificio, elude controles de acceso, clona credenciales, coloca dispositivos y usa ingeniería social presencial para lograr un…</a:t>
             </a:r>
           </a:p>
         </p:txBody>
@@ -4077,7 +4438,7 @@
                   <a:srgbClr val="0B3D2E"/>
                 </a:solidFill>
               </a:rPr>
-              <a:t>📖 Definiciones y características</a:t>
+              <a:t>🧠 Explicación en profundidad</a:t>
             </a:r>
           </a:p>
         </p:txBody>
@@ -4115,82 +4476,82 @@
                   <a:srgbClr val="22282E"/>
                 </a:solidFill>
               </a:rPr>
-              <a:t>•  Tailgating / piggybacking: entrar detrás de un empleado autorizado. Característica: explota la cortesía humana, no un fallo técnico.</a:t>
-            </a:r>
-          </a:p>
-          <a:p>
-            <a:pPr>
-              <a:spcAft>
-                <a:spcPts val="600"/>
-              </a:spcAft>
-            </a:pPr>
-            <a:r>
-              <a:rPr sz="1500">
-                <a:solidFill>
-                  <a:srgbClr val="22282E"/>
-                </a:solidFill>
-              </a:rPr>
-              <a:t>•  Clonado RFID: copiar una tarjeta de acceso (125 kHz / 13.56 MHz). Característica: posible con lectores portátiles a corta distancia.</a:t>
-            </a:r>
-          </a:p>
-          <a:p>
-            <a:pPr>
-              <a:spcAft>
-                <a:spcPts val="600"/>
-              </a:spcAft>
-            </a:pPr>
-            <a:r>
-              <a:rPr sz="1500">
-                <a:solidFill>
-                  <a:srgbClr val="22282E"/>
-                </a:solidFill>
-              </a:rPr>
-              <a:t>•  Dropbox: dispositivo (ej. una mini-PC) dejado en la red interna con conectividad C2. Característica: convierte el acceso físico en foothold remoto.</a:t>
-            </a:r>
-          </a:p>
-          <a:p>
-            <a:pPr>
-              <a:spcAft>
-                <a:spcPts val="600"/>
-              </a:spcAft>
-            </a:pPr>
-            <a:r>
-              <a:rPr sz="1500">
-                <a:solidFill>
-                  <a:srgbClr val="22282E"/>
-                </a:solidFill>
-              </a:rPr>
-              <a:t>•  HID injection: dispositivo que se hace pasar por teclado (Rubber Ducky) para ejecutar comandos. Característica: rápido y difícil de bloquear por USB storage policies.</a:t>
-            </a:r>
-          </a:p>
-          <a:p>
-            <a:pPr>
-              <a:spcAft>
-                <a:spcPts val="600"/>
-              </a:spcAft>
-            </a:pPr>
-            <a:r>
-              <a:rPr sz="1500">
-                <a:solidFill>
-                  <a:srgbClr val="22282E"/>
-                </a:solidFill>
-              </a:rPr>
-              <a:t>•  Get-out-of-jail letter: carta firmada que autoriza al operador y evita consecuencias legales si es descubierto. Característica: imprescindible; se lleva siempre encima.</a:t>
-            </a:r>
-          </a:p>
-          <a:p>
-            <a:pPr>
-              <a:spcAft>
-                <a:spcPts val="600"/>
-              </a:spcAft>
-            </a:pPr>
-            <a:r>
-              <a:rPr sz="1500">
-                <a:solidFill>
-                  <a:srgbClr val="22282E"/>
-                </a:solidFill>
-              </a:rPr>
-              <a:t>•  RoE físicas: reglas de qué edificios, horarios y métodos están permitidos. Característica: delimitan el ejercicio físico.</a:t>
+              <a:t>•  Una evaluación física no se autoriza solo con una dirección. Las reglas deben identificar edificios y zonas excluidas, horarios, técnicas permitidas, personas que no pueden ser involucradas…</a:t>
+            </a:r>
+          </a:p>
+          <a:p>
+            <a:pPr>
+              <a:spcAft>
+                <a:spcPts val="600"/>
+              </a:spcAft>
+            </a:pPr>
+            <a:r>
+              <a:rPr sz="1500">
+                <a:solidFill>
+                  <a:srgbClr val="22282E"/>
+                </a:solidFill>
+              </a:rPr>
+              <a:t>•  El reconocimiento se limita a información necesaria para probar controles. Registrar matrículas, rostros o rutinas puede crear datos personales que la organización no necesita. La evidencia debe…</a:t>
+            </a:r>
+          </a:p>
+          <a:p>
+            <a:pPr>
+              <a:spcAft>
+                <a:spcPts val="600"/>
+              </a:spcAft>
+            </a:pPr>
+            <a:r>
+              <a:rPr sz="1500">
+                <a:solidFill>
+                  <a:srgbClr val="22282E"/>
+                </a:solidFill>
+              </a:rPr>
+              <a:t>•  Una tarjeta no es todo el sistema de acceso. Importan enrolamiento, tecnología, lector, controlador, puerta, anti-passback, vigilancia y conducta del personal. La posibilidad de leer o copiar un…</a:t>
+            </a:r>
+          </a:p>
+          <a:p>
+            <a:pPr>
+              <a:spcAft>
+                <a:spcPts val="600"/>
+              </a:spcAft>
+            </a:pPr>
+            <a:r>
+              <a:rPr sz="1500">
+                <a:solidFill>
+                  <a:srgbClr val="22282E"/>
+                </a:solidFill>
+              </a:rPr>
+              <a:t>•  Igualmente, un dispositivo USB que declara ser teclado no obtiene privilegios automáticamente. Intervienen bloqueo de pantalla, control de dispositivos, privilegios de la sesión, allowlisting y EDR.…</a:t>
+            </a:r>
+          </a:p>
+          <a:p>
+            <a:pPr>
+              <a:spcAft>
+                <a:spcPts val="600"/>
+              </a:spcAft>
+            </a:pPr>
+            <a:r>
+              <a:rPr sz="1500">
+                <a:solidFill>
+                  <a:srgbClr val="22282E"/>
+                </a:solidFill>
+              </a:rPr>
+              <a:t>•  El objetivo se valida con marcadores inocuos: alcanzar una zona acordada, presentar una tarjeta de prueba, conectar a una VLAN preparada o fotografiar un token puesto por la white cell. No se fuerza…</a:t>
+            </a:r>
+          </a:p>
+          <a:p>
+            <a:pPr>
+              <a:spcAft>
+                <a:spcPts val="600"/>
+              </a:spcAft>
+            </a:pPr>
+            <a:r>
+              <a:rPr sz="1500">
+                <a:solidFill>
+                  <a:srgbClr val="22282E"/>
+                </a:solidFill>
+              </a:rPr>
+              <a:t>•  Al terminar se contabilizan dispositivos, se retiran implantes de prueba, se revocan credenciales temporales y se informa cualquier debilidad que pueda causar un riesgo inmediato. El hallazgo explica…</a:t>
             </a:r>
           </a:p>
         </p:txBody>
@@ -4241,7 +4602,7 @@
                   <a:srgbClr val="0B3D2E"/>
                 </a:solidFill>
               </a:rPr>
-              <a:t>🧰 Herramientas y preparación</a:t>
+              <a:t>📖 Definiciones y características</a:t>
             </a:r>
           </a:p>
         </p:txBody>
@@ -4279,52 +4640,82 @@
                   <a:srgbClr val="22282E"/>
                 </a:solidFill>
               </a:rPr>
-              <a:t>•  Herramientas de estudio: Proxmark3/Flipper Zero (RFID), Rubber Ducky/O.MG cable (HID), lockpicks (donde sea legal), una mini-PC como dropbox.</a:t>
-            </a:r>
-          </a:p>
-          <a:p>
-            <a:pPr>
-              <a:spcAft>
-                <a:spcPts val="600"/>
-              </a:spcAft>
-            </a:pPr>
-            <a:r>
-              <a:rPr sz="1500">
-                <a:solidFill>
-                  <a:srgbClr val="22282E"/>
-                </a:solidFill>
-              </a:rPr>
-              <a:t>•  Cámara y libreta para el reconocimiento; ropa/props para el pretexto.</a:t>
-            </a:r>
-          </a:p>
-          <a:p>
-            <a:pPr>
-              <a:spcAft>
-                <a:spcPts val="600"/>
-              </a:spcAft>
-            </a:pPr>
-            <a:r>
-              <a:rPr sz="1500">
-                <a:solidFill>
-                  <a:srgbClr val="22282E"/>
-                </a:solidFill>
-              </a:rPr>
-              <a:t>•  La carta de autorización firmada y las RoE físicas del engagement.</a:t>
-            </a:r>
-          </a:p>
-          <a:p>
-            <a:pPr>
-              <a:spcAft>
-                <a:spcPts val="600"/>
-              </a:spcAft>
-            </a:pPr>
-            <a:r>
-              <a:rPr sz="1500">
-                <a:solidFill>
-                  <a:srgbClr val="22282E"/>
-                </a:solidFill>
-              </a:rPr>
-              <a:t>•  Conectividad C2 preparada para el dropbox (Clases 164–165).</a:t>
+              <a:t>•  Tailgating / piggybacking: entrar detrás de un empleado autorizado. Característica: explota la cortesía humana, no un fallo técnico.</a:t>
+            </a:r>
+          </a:p>
+          <a:p>
+            <a:pPr>
+              <a:spcAft>
+                <a:spcPts val="600"/>
+              </a:spcAft>
+            </a:pPr>
+            <a:r>
+              <a:rPr sz="1500">
+                <a:solidFill>
+                  <a:srgbClr val="22282E"/>
+                </a:solidFill>
+              </a:rPr>
+              <a:t>•  Clonado RFID: reproducción de datos de credenciales compatibles y débiles. Característica: no toda tarjeta de 125 kHz o 13,56 MHz es clonable; protocolo, claves y backend determinan el riesgo.</a:t>
+            </a:r>
+          </a:p>
+          <a:p>
+            <a:pPr>
+              <a:spcAft>
+                <a:spcPts val="600"/>
+              </a:spcAft>
+            </a:pPr>
+            <a:r>
+              <a:rPr sz="1500">
+                <a:solidFill>
+                  <a:srgbClr val="22282E"/>
+                </a:solidFill>
+              </a:rPr>
+              <a:t>•  Dropbox: dispositivo (ej. una mini-PC) dejado en la red interna con conectividad C2. Característica: convierte el acceso físico en foothold remoto.</a:t>
+            </a:r>
+          </a:p>
+          <a:p>
+            <a:pPr>
+              <a:spcAft>
+                <a:spcPts val="600"/>
+              </a:spcAft>
+            </a:pPr>
+            <a:r>
+              <a:rPr sz="1500">
+                <a:solidFill>
+                  <a:srgbClr val="22282E"/>
+                </a:solidFill>
+              </a:rPr>
+              <a:t>•  HID injection: dispositivo que se hace pasar por teclado (Rubber Ducky) para ejecutar comandos. Característica: rápido y difícil de bloquear por USB storage policies.</a:t>
+            </a:r>
+          </a:p>
+          <a:p>
+            <a:pPr>
+              <a:spcAft>
+                <a:spcPts val="600"/>
+              </a:spcAft>
+            </a:pPr>
+            <a:r>
+              <a:rPr sz="1500">
+                <a:solidFill>
+                  <a:srgbClr val="22282E"/>
+                </a:solidFill>
+              </a:rPr>
+              <a:t>•  Carta de autorización de emergencia: documento firmado y verificable que acredita alcance y contactos si el operador es interceptado. Característica: no otorga inmunidad ni sustituye el cumplimiento…</a:t>
+            </a:r>
+          </a:p>
+          <a:p>
+            <a:pPr>
+              <a:spcAft>
+                <a:spcPts val="600"/>
+              </a:spcAft>
+            </a:pPr>
+            <a:r>
+              <a:rPr sz="1500">
+                <a:solidFill>
+                  <a:srgbClr val="22282E"/>
+                </a:solidFill>
+              </a:rPr>
+              <a:t>•  RoE físicas: reglas de qué edificios, horarios y métodos están permitidos. Característica: delimitan el ejercicio físico.</a:t>
             </a:r>
           </a:p>
         </p:txBody>
@@ -4375,7 +4766,7 @@
                   <a:srgbClr val="0B3D2E"/>
                 </a:solidFill>
               </a:rPr>
-              <a:t>🧪 Laboratorio guiado (entorno propio)</a:t>
+              <a:t>📔 Glosario</a:t>
             </a:r>
           </a:p>
         </p:txBody>
@@ -4413,97 +4804,97 @@
                   <a:srgbClr val="22282E"/>
                 </a:solidFill>
               </a:rPr>
-              <a:t>•  Reconocimiento simulado. Sobre un edificio ficticio, documenta accesos, horarios, tipos de badge y puntos ciegos que observarías (ejercicio en papel/mapa).</a:t>
-            </a:r>
-          </a:p>
-          <a:p>
-            <a:pPr>
-              <a:spcAft>
-                <a:spcPts val="600"/>
-              </a:spcAft>
-            </a:pPr>
-            <a:r>
-              <a:rPr sz="1500">
-                <a:solidFill>
-                  <a:srgbClr val="22282E"/>
-                </a:solidFill>
-              </a:rPr>
-              <a:t>•  Diseña el pretexto. Elige uno (técnico de mantenimiento, repartidor) y prepara props y una historia coherente.</a:t>
-            </a:r>
-          </a:p>
-          <a:p>
-            <a:pPr>
-              <a:spcAft>
-                <a:spcPts val="600"/>
-              </a:spcAft>
-            </a:pPr>
-            <a:r>
-              <a:rPr sz="1500">
-                <a:solidFill>
-                  <a:srgbClr val="22282E"/>
-                </a:solidFill>
-              </a:rPr>
-              <a:t>•  Clonado RFID (tu propia tarjeta). Con un lector, lee y clona una tarjeta que te pertenezca para entender el proceso; nunca la de un tercero.</a:t>
-            </a:r>
-          </a:p>
-          <a:p>
-            <a:pPr>
-              <a:spcAft>
-                <a:spcPts val="600"/>
-              </a:spcAft>
-            </a:pPr>
-            <a:r>
-              <a:rPr sz="1500">
-                <a:solidFill>
-                  <a:srgbClr val="22282E"/>
-                </a:solidFill>
-              </a:rPr>
-              <a:t>•  HID injection (tu equipo). Programa un Rubber Ducky para abrir una shell C2 en tu máquina de laboratorio y mide cuánto tarda.</a:t>
-            </a:r>
-          </a:p>
-          <a:p>
-            <a:pPr>
-              <a:spcAft>
-                <a:spcPts val="600"/>
-              </a:spcAft>
-            </a:pPr>
-            <a:r>
-              <a:rPr sz="1500">
-                <a:solidFill>
-                  <a:srgbClr val="22282E"/>
-                </a:solidFill>
-              </a:rPr>
-              <a:t>•  Prepara un dropbox. Configura una mini-PC/VM que, al conectarse a la red del lab, establezca C2 saliente por el redirector.</a:t>
-            </a:r>
-          </a:p>
-          <a:p>
-            <a:pPr>
-              <a:spcAft>
-                <a:spcPts val="600"/>
-              </a:spcAft>
-            </a:pPr>
-            <a:r>
-              <a:rPr sz="1500">
-                <a:solidFill>
-                  <a:srgbClr val="22282E"/>
-                </a:solidFill>
-              </a:rPr>
-              <a:t>•  Documenta la carta de autorización. Redacta una plantilla de get-out-of-jail letter con los campos esenciales.</a:t>
-            </a:r>
-          </a:p>
-          <a:p>
-            <a:pPr>
-              <a:spcAft>
-                <a:spcPts val="600"/>
-              </a:spcAft>
-            </a:pPr>
-            <a:r>
-              <a:rPr sz="1500">
-                <a:solidFill>
-                  <a:srgbClr val="22282E"/>
-                </a:solidFill>
-              </a:rPr>
-              <a:t>•  Puente a la red. Explica cómo el dropbox o el HID te dan el foothold que continuaría en las técnicas de AD ya vistas.</a:t>
+              <a:t>•  Alcance físico: espacios, horarios, personas y métodos incluidos expresamente.</a:t>
+            </a:r>
+          </a:p>
+          <a:p>
+            <a:pPr>
+              <a:spcAft>
+                <a:spcPts val="600"/>
+              </a:spcAft>
+            </a:pPr>
+            <a:r>
+              <a:rPr sz="1500">
+                <a:solidFill>
+                  <a:srgbClr val="22282E"/>
+                </a:solidFill>
+              </a:rPr>
+              <a:t>•  Zona restringida: área con controles adicionales por sensibilidad o seguridad.</a:t>
+            </a:r>
+          </a:p>
+          <a:p>
+            <a:pPr>
+              <a:spcAft>
+                <a:spcPts val="600"/>
+              </a:spcAft>
+            </a:pPr>
+            <a:r>
+              <a:rPr sz="1500">
+                <a:solidFill>
+                  <a:srgbClr val="22282E"/>
+                </a:solidFill>
+              </a:rPr>
+              <a:t>•  Tailgating: entrada no autorizada aprovechando la apertura de una persona autorizada.</a:t>
+            </a:r>
+          </a:p>
+          <a:p>
+            <a:pPr>
+              <a:spcAft>
+                <a:spcPts val="600"/>
+              </a:spcAft>
+            </a:pPr>
+            <a:r>
+              <a:rPr sz="1500">
+                <a:solidFill>
+                  <a:srgbClr val="22282E"/>
+                </a:solidFill>
+              </a:rPr>
+              <a:t>•  Piggybacking: acceso con conocimiento o cooperación de quien habilita el paso; el uso varía entre organizaciones.</a:t>
+            </a:r>
+          </a:p>
+          <a:p>
+            <a:pPr>
+              <a:spcAft>
+                <a:spcPts val="600"/>
+              </a:spcAft>
+            </a:pPr>
+            <a:r>
+              <a:rPr sz="1500">
+                <a:solidFill>
+                  <a:srgbClr val="22282E"/>
+                </a:solidFill>
+              </a:rPr>
+              <a:t>•  Badge: credencial física o móvil presentada a un sistema de control de acceso.</a:t>
+            </a:r>
+          </a:p>
+          <a:p>
+            <a:pPr>
+              <a:spcAft>
+                <a:spcPts val="600"/>
+              </a:spcAft>
+            </a:pPr>
+            <a:r>
+              <a:rPr sz="1500">
+                <a:solidFill>
+                  <a:srgbClr val="22282E"/>
+                </a:solidFill>
+              </a:rPr>
+              <a:t>•  RFID/NFC: familias de tecnologías de radio; frecuencia por sí sola no determina seguridad.</a:t>
+            </a:r>
+          </a:p>
+          <a:p>
+            <a:pPr>
+              <a:spcAft>
+                <a:spcPts val="600"/>
+              </a:spcAft>
+            </a:pPr>
+            <a:r>
+              <a:rPr sz="1500">
+                <a:solidFill>
+                  <a:srgbClr val="22282E"/>
+                </a:solidFill>
+              </a:rPr>
+              <a:t>•  HID: clase de dispositivo de interfaz humana, como teclado o ratón.</a:t>
             </a:r>
           </a:p>
         </p:txBody>
@@ -4554,7 +4945,7 @@
                   <a:srgbClr val="0B3D2E"/>
                 </a:solidFill>
               </a:rPr>
-              <a:t>✍️ Ejercicios</a:t>
+              <a:t>🧰 Herramientas y preparación</a:t>
             </a:r>
           </a:p>
         </p:txBody>
@@ -4592,82 +4983,52 @@
                   <a:srgbClr val="22282E"/>
                 </a:solidFill>
               </a:rPr>
-              <a:t>•  Redacta un plan de reconocimiento físico para un edificio ficticio.</a:t>
-            </a:r>
-          </a:p>
-          <a:p>
-            <a:pPr>
-              <a:spcAft>
-                <a:spcPts val="600"/>
-              </a:spcAft>
-            </a:pPr>
-            <a:r>
-              <a:rPr sz="1500">
-                <a:solidFill>
-                  <a:srgbClr val="22282E"/>
-                </a:solidFill>
-              </a:rPr>
-              <a:t>•  Diseña dos pretextos presenciales y evalúa sus riesgos.</a:t>
-            </a:r>
-          </a:p>
-          <a:p>
-            <a:pPr>
-              <a:spcAft>
-                <a:spcPts val="600"/>
-              </a:spcAft>
-            </a:pPr>
-            <a:r>
-              <a:rPr sz="1500">
-                <a:solidFill>
-                  <a:srgbClr val="22282E"/>
-                </a:solidFill>
-              </a:rPr>
-              <a:t>•  Explica el clonado RFID y sus límites según la frecuencia.</a:t>
-            </a:r>
-          </a:p>
-          <a:p>
-            <a:pPr>
-              <a:spcAft>
-                <a:spcPts val="600"/>
-              </a:spcAft>
-            </a:pPr>
-            <a:r>
-              <a:rPr sz="1500">
-                <a:solidFill>
-                  <a:srgbClr val="22282E"/>
-                </a:solidFill>
-              </a:rPr>
-              <a:t>•  Programa un payload HID que lance una shell en tu lab.</a:t>
-            </a:r>
-          </a:p>
-          <a:p>
-            <a:pPr>
-              <a:spcAft>
-                <a:spcPts val="600"/>
-              </a:spcAft>
-            </a:pPr>
-            <a:r>
-              <a:rPr sz="1500">
-                <a:solidFill>
-                  <a:srgbClr val="22282E"/>
-                </a:solidFill>
-              </a:rPr>
-              <a:t>•  Configura un dropbox que llame a casa por C2.</a:t>
-            </a:r>
-          </a:p>
-          <a:p>
-            <a:pPr>
-              <a:spcAft>
-                <a:spcPts val="600"/>
-              </a:spcAft>
-            </a:pPr>
-            <a:r>
-              <a:rPr sz="1500">
-                <a:solidFill>
-                  <a:srgbClr val="22282E"/>
-                </a:solidFill>
-              </a:rPr>
-              <a:t>•  Escribe una plantilla de carta de autorización con 8 campos.</a:t>
+              <a:t>•  Herramientas de estudio: Proxmark3/Flipper Zero (RFID), Rubber Ducky/O.MG cable (HID), lockpicks (donde sea legal), una mini-PC como dropbox.</a:t>
+            </a:r>
+          </a:p>
+          <a:p>
+            <a:pPr>
+              <a:spcAft>
+                <a:spcPts val="600"/>
+              </a:spcAft>
+            </a:pPr>
+            <a:r>
+              <a:rPr sz="1500">
+                <a:solidFill>
+                  <a:srgbClr val="22282E"/>
+                </a:solidFill>
+              </a:rPr>
+              <a:t>•  Cámara y libreta para el reconocimiento; ropa/props para el pretexto.</a:t>
+            </a:r>
+          </a:p>
+          <a:p>
+            <a:pPr>
+              <a:spcAft>
+                <a:spcPts val="600"/>
+              </a:spcAft>
+            </a:pPr>
+            <a:r>
+              <a:rPr sz="1500">
+                <a:solidFill>
+                  <a:srgbClr val="22282E"/>
+                </a:solidFill>
+              </a:rPr>
+              <a:t>•  La carta de autorización firmada y las RoE físicas del engagement.</a:t>
+            </a:r>
+          </a:p>
+          <a:p>
+            <a:pPr>
+              <a:spcAft>
+                <a:spcPts val="600"/>
+              </a:spcAft>
+            </a:pPr>
+            <a:r>
+              <a:rPr sz="1500">
+                <a:solidFill>
+                  <a:srgbClr val="22282E"/>
+                </a:solidFill>
+              </a:rPr>
+              <a:t>•  Conectividad C2 preparada para el dropbox (Clases 164–165).</a:t>
             </a:r>
           </a:p>
         </p:txBody>
@@ -4718,7 +5079,7 @@
                   <a:srgbClr val="0B3D2E"/>
                 </a:solidFill>
               </a:rPr>
-              <a:t>📝 Reto verificable</a:t>
+              <a:t>🧪 Laboratorio guiado (entorno propio)</a:t>
             </a:r>
           </a:p>
         </p:txBody>
@@ -4756,22 +5117,97 @@
                   <a:srgbClr val="22282E"/>
                 </a:solidFill>
               </a:rPr>
-              <a:t>•  Prepara un kit de operación física (teórico + práctico en tu entorno): plan de recon, pretexto, un HID que lanza C2 en tu equipo, un dropbox que establece C2 en tu lab y una carta de autorización.</a:t>
-            </a:r>
-          </a:p>
-          <a:p>
-            <a:pPr>
-              <a:spcAft>
-                <a:spcPts val="600"/>
-              </a:spcAft>
-            </a:pPr>
-            <a:r>
-              <a:rPr sz="1500">
-                <a:solidFill>
-                  <a:srgbClr val="22282E"/>
-                </a:solidFill>
-              </a:rPr>
-              <a:t>•  Criterio de aceptación: demuestras el HID abriendo una sesión C2 en tu propia máquina y el dropbox estableciendo C2 en tu lab; entregas el plan de recon, el pretexto y la carta de autorización completa. Nada se prueba fuera de tu propiedad.</a:t>
+              <a:t>•  Reconocimiento simulado. Sobre un edificio ficticio, documenta accesos, horarios, tipos de badge y puntos ciegos que observarías (ejercicio en papel/mapa).</a:t>
+            </a:r>
+          </a:p>
+          <a:p>
+            <a:pPr>
+              <a:spcAft>
+                <a:spcPts val="600"/>
+              </a:spcAft>
+            </a:pPr>
+            <a:r>
+              <a:rPr sz="1500">
+                <a:solidFill>
+                  <a:srgbClr val="22282E"/>
+                </a:solidFill>
+              </a:rPr>
+              <a:t>•  Diseña el pretexto. Elige uno (técnico de mantenimiento, repartidor) y prepara props y una historia coherente.</a:t>
+            </a:r>
+          </a:p>
+          <a:p>
+            <a:pPr>
+              <a:spcAft>
+                <a:spcPts val="600"/>
+              </a:spcAft>
+            </a:pPr>
+            <a:r>
+              <a:rPr sz="1500">
+                <a:solidFill>
+                  <a:srgbClr val="22282E"/>
+                </a:solidFill>
+              </a:rPr>
+              <a:t>•  Clonado RFID (tu propia tarjeta). Con un lector, lee y clona una tarjeta que te pertenezca para entender el proceso; nunca la de un tercero.</a:t>
+            </a:r>
+          </a:p>
+          <a:p>
+            <a:pPr>
+              <a:spcAft>
+                <a:spcPts val="600"/>
+              </a:spcAft>
+            </a:pPr>
+            <a:r>
+              <a:rPr sz="1500">
+                <a:solidFill>
+                  <a:srgbClr val="22282E"/>
+                </a:solidFill>
+              </a:rPr>
+              <a:t>•  HID injection (tu equipo). Programa un Rubber Ducky para abrir una shell C2 en tu máquina de laboratorio y mide cuánto tarda.</a:t>
+            </a:r>
+          </a:p>
+          <a:p>
+            <a:pPr>
+              <a:spcAft>
+                <a:spcPts val="600"/>
+              </a:spcAft>
+            </a:pPr>
+            <a:r>
+              <a:rPr sz="1500">
+                <a:solidFill>
+                  <a:srgbClr val="22282E"/>
+                </a:solidFill>
+              </a:rPr>
+              <a:t>•  Prepara un dropbox. Configura una mini-PC/VM que, al conectarse a la red del lab, establezca C2 saliente por el redirector.</a:t>
+            </a:r>
+          </a:p>
+          <a:p>
+            <a:pPr>
+              <a:spcAft>
+                <a:spcPts val="600"/>
+              </a:spcAft>
+            </a:pPr>
+            <a:r>
+              <a:rPr sz="1500">
+                <a:solidFill>
+                  <a:srgbClr val="22282E"/>
+                </a:solidFill>
+              </a:rPr>
+              <a:t>•  Documenta la carta de autorización. Redacta una plantilla de get-out-of-jail letter con los campos esenciales.</a:t>
+            </a:r>
+          </a:p>
+          <a:p>
+            <a:pPr>
+              <a:spcAft>
+                <a:spcPts val="600"/>
+              </a:spcAft>
+            </a:pPr>
+            <a:r>
+              <a:rPr sz="1500">
+                <a:solidFill>
+                  <a:srgbClr val="22282E"/>
+                </a:solidFill>
+              </a:rPr>
+              <a:t>•  Puente a la red. Explica cómo el dropbox o el HID te dan el foothold que continuaría en las técnicas de AD ya vistas.</a:t>
             </a:r>
           </a:p>
         </p:txBody>
